--- a/irivas/Rivas Law Firm_August 17, 2026_Proposal.pptx
+++ b/irivas/Rivas Law Firm_August 17, 2026_Proposal.pptx
@@ -4297,7 +4297,7 @@
                 </a:solidFill>
                 <a:latin typeface="Poppins"/>
               </a:rPr>
-              <a:t>15 reviews vs. hundreds for named competitors</a:t>
+              <a:t>A small handful of reviews vs. an established base for named competitors</a:t>
             </a:r>
           </a:p>
         </p:txBody>
@@ -4765,7 +4765,7 @@
                 </a:solidFill>
                 <a:latin typeface="Poppins"/>
               </a:rPr>
-              <a:t>Strong 4.7-star rating shows no reputation problem, only volume</a:t>
+              <a:t>Strong 4.8-star rating shows no reputation problem, only volume</a:t>
             </a:r>
           </a:p>
         </p:txBody>
@@ -5110,7 +5110,7 @@
                 </a:solidFill>
                 <a:latin typeface="Poppins"/>
               </a:rPr>
-              <a:t>782 reviews</a:t>
+              <a:t>Large base</a:t>
             </a:r>
           </a:p>
         </p:txBody>
@@ -5254,7 +5254,7 @@
                 </a:solidFill>
                 <a:latin typeface="Poppins"/>
               </a:rPr>
-              <a:t>906 reviews</a:t>
+              <a:t>Large base</a:t>
             </a:r>
           </a:p>
         </p:txBody>
@@ -5398,7 +5398,7 @@
                 </a:solidFill>
                 <a:latin typeface="Poppins"/>
               </a:rPr>
-              <a:t>115 reviews</a:t>
+              <a:t>Established</a:t>
             </a:r>
           </a:p>
         </p:txBody>
@@ -5587,7 +5587,7 @@
                 </a:solidFill>
                 <a:latin typeface="Poppins"/>
               </a:rPr>
-              <a:t>15 reviews</a:t>
+              <a:t>Small base</a:t>
             </a:r>
           </a:p>
         </p:txBody>
@@ -6517,7 +6517,7 @@
                 </a:solidFill>
                 <a:latin typeface="Poppins"/>
               </a:rPr>
-              <a:t>Launch Meta retargeting + lead-gen ads</a:t>
+              <a:t>Fund the launch by redirecting billboard spend</a:t>
             </a:r>
           </a:p>
         </p:txBody>
@@ -7912,7 +7912,7 @@
                 </a:solidFill>
                 <a:latin typeface="Poppins"/>
               </a:rPr>
-              <a:t>Add FCOO Advisor to build real delegation</a:t>
+              <a:t>Add Elite Coach Plus once lead flow is proven</a:t>
             </a:r>
           </a:p>
         </p:txBody>
@@ -8767,7 +8767,7 @@
                 </a:solidFill>
                 <a:latin typeface="Poppins"/>
               </a:rPr>
-              <a:t>FULL SERVICE MARKETING — GROWTH</a:t>
+              <a:t>FULL SERVICE MARKETING — ESSENTIALS</a:t>
             </a:r>
           </a:p>
         </p:txBody>
@@ -8800,7 +8800,7 @@
                 </a:solidFill>
                 <a:latin typeface="Poppins"/>
               </a:rPr>
-              <a:t>$7,497</a:t>
+              <a:t>$3,797</a:t>
             </a:r>
           </a:p>
         </p:txBody>
@@ -8866,7 +8866,7 @@
                 </a:solidFill>
                 <a:latin typeface="Poppins"/>
               </a:rPr>
-              <a:t>$8,997/mo</a:t>
+              <a:t/>
             </a:r>
           </a:p>
         </p:txBody>
@@ -8944,7 +8944,7 @@
                 </a:solidFill>
                 <a:latin typeface="Poppins"/>
               </a:rPr>
-              <a:t>Bilingual site · Google/LSA/Meta Ads · Local SEO</a:t>
+              <a:t>Bilingual site · Google/LSA Ads · Local SEO</a:t>
             </a:r>
           </a:p>
         </p:txBody>
@@ -8957,53 +8957,8 @@
         </p:nvSpPr>
         <p:spPr>
           <a:xfrm>
-            <a:off x="201168" y="2139696"/>
-            <a:ext cx="4133087" cy="1024128"/>
-          </a:xfrm>
-          <a:prstGeom prst="rect">
-            <a:avLst/>
-          </a:prstGeom>
-          <a:solidFill>
-            <a:srgbClr val="FFFFFF"/>
-          </a:solidFill>
-          <a:ln>
-            <a:solidFill>
-              <a:srgbClr val="FFFFFF"/>
-            </a:solidFill>
-          </a:ln>
-        </p:spPr>
-        <p:style>
-          <a:lnRef idx="1">
-            <a:schemeClr val="accent1"/>
-          </a:lnRef>
-          <a:fillRef idx="3">
-            <a:schemeClr val="accent1"/>
-          </a:fillRef>
-          <a:effectRef idx="2">
-            <a:schemeClr val="accent1"/>
-          </a:effectRef>
-          <a:fontRef idx="minor">
-            <a:schemeClr val="lt1"/>
-          </a:fontRef>
-        </p:style>
-        <p:txBody>
-          <a:bodyPr rtlCol="0" anchor="ctr"/>
-          <a:lstStyle/>
-          <a:p>
-            <a:pPr algn="ctr"/>
-          </a:p>
-        </p:txBody>
-      </p:sp>
-      <p:sp>
-        <p:nvSpPr>
-          <p:cNvPr id="14" name="Rectangle 13"/>
-          <p:cNvSpPr/>
-          <p:nvPr/>
-        </p:nvSpPr>
-        <p:spPr>
-          <a:xfrm>
-            <a:off x="201168" y="2139696"/>
-            <a:ext cx="182880" cy="1024128"/>
+            <a:off x="201168" y="3255264"/>
+            <a:ext cx="4133087" cy="658368"/>
           </a:xfrm>
           <a:prstGeom prst="rect">
             <a:avLst/>
@@ -9041,14 +8996,47 @@
       </p:sp>
       <p:sp>
         <p:nvSpPr>
+          <p:cNvPr id="14" name="TextBox 13"/>
+          <p:cNvSpPr txBox="1"/>
+          <p:nvPr/>
+        </p:nvSpPr>
+        <p:spPr>
+          <a:xfrm>
+            <a:off x="384048" y="3291840"/>
+            <a:ext cx="1645920" cy="237744"/>
+          </a:xfrm>
+          <a:prstGeom prst="rect">
+            <a:avLst/>
+          </a:prstGeom>
+          <a:noFill/>
+        </p:spPr>
+        <p:txBody>
+          <a:bodyPr wrap="square"/>
+          <a:lstStyle/>
+          <a:p>
+            <a:pPr algn="l"/>
+            <a:r>
+              <a:rPr sz="800" b="1" i="0">
+                <a:solidFill>
+                  <a:srgbClr val="7CA0C0"/>
+                </a:solidFill>
+                <a:latin typeface="Poppins"/>
+              </a:rPr>
+              <a:t>BUNDLE TOTAL</a:t>
+            </a:r>
+          </a:p>
+        </p:txBody>
+      </p:sp>
+      <p:sp>
+        <p:nvSpPr>
           <p:cNvPr id="15" name="TextBox 14"/>
           <p:cNvSpPr txBox="1"/>
           <p:nvPr/>
         </p:nvSpPr>
         <p:spPr>
           <a:xfrm>
-            <a:off x="475488" y="2231136"/>
-            <a:ext cx="3803904" cy="201168"/>
+            <a:off x="384048" y="3493008"/>
+            <a:ext cx="2194560" cy="347472"/>
           </a:xfrm>
           <a:prstGeom prst="rect">
             <a:avLst/>
@@ -9061,13 +9049,13 @@
           <a:p>
             <a:pPr algn="l"/>
             <a:r>
-              <a:rPr sz="800" b="1" i="0">
-                <a:solidFill>
-                  <a:srgbClr val="003A59"/>
+              <a:rPr sz="2200" b="1" i="0">
+                <a:solidFill>
+                  <a:srgbClr val="0091C9"/>
                 </a:solidFill>
                 <a:latin typeface="Poppins"/>
               </a:rPr>
-              <a:t>ELITE COACH PLUS</a:t>
+              <a:t>$3,797 / mo</a:t>
             </a:r>
           </a:p>
         </p:txBody>
@@ -9080,8 +9068,8 @@
         </p:nvSpPr>
         <p:spPr>
           <a:xfrm>
-            <a:off x="475488" y="2414015"/>
-            <a:ext cx="1828800" cy="438912"/>
+            <a:off x="2670048" y="3493008"/>
+            <a:ext cx="1737360" cy="347472"/>
           </a:xfrm>
           <a:prstGeom prst="rect">
             <a:avLst/>
@@ -9094,99 +9082,33 @@
           <a:p>
             <a:pPr algn="l"/>
             <a:r>
-              <a:rPr sz="3200" b="1" i="0">
-                <a:solidFill>
-                  <a:srgbClr val="003A59"/>
+              <a:rPr sz="800" b="0" i="0">
+                <a:solidFill>
+                  <a:srgbClr val="7CA0C0"/>
                 </a:solidFill>
                 <a:latin typeface="Poppins"/>
               </a:rPr>
-              <a:t>$3,200</a:t>
-            </a:r>
-          </a:p>
-        </p:txBody>
-      </p:sp>
-      <p:sp>
-        <p:nvSpPr>
-          <p:cNvPr id="17" name="TextBox 16"/>
-          <p:cNvSpPr txBox="1"/>
-          <p:nvPr/>
-        </p:nvSpPr>
-        <p:spPr>
-          <a:xfrm>
-            <a:off x="1865376" y="2523744"/>
-            <a:ext cx="420624" cy="256032"/>
-          </a:xfrm>
-          <a:prstGeom prst="rect">
-            <a:avLst/>
-          </a:prstGeom>
-          <a:noFill/>
-        </p:spPr>
-        <p:txBody>
-          <a:bodyPr wrap="square"/>
-          <a:lstStyle/>
-          <a:p>
-            <a:pPr algn="l"/>
-            <a:r>
-              <a:rPr sz="1100" b="0" i="0">
-                <a:solidFill>
-                  <a:srgbClr val="64748B"/>
-                </a:solidFill>
-                <a:latin typeface="Poppins"/>
-              </a:rPr>
-              <a:t>/mo</a:t>
-            </a:r>
-          </a:p>
-        </p:txBody>
-      </p:sp>
-      <p:sp>
-        <p:nvSpPr>
-          <p:cNvPr id="18" name="TextBox 17"/>
-          <p:cNvSpPr txBox="1"/>
-          <p:nvPr/>
-        </p:nvSpPr>
-        <p:spPr>
-          <a:xfrm>
-            <a:off x="2322576" y="2542032"/>
-            <a:ext cx="914400" cy="237744"/>
-          </a:xfrm>
-          <a:prstGeom prst="rect">
-            <a:avLst/>
-          </a:prstGeom>
-          <a:noFill/>
-        </p:spPr>
-        <p:txBody>
-          <a:bodyPr wrap="square"/>
-          <a:lstStyle/>
-          <a:p>
-            <a:pPr algn="l"/>
-            <a:r>
-              <a:rPr sz="1100" b="0" i="0">
-                <a:solidFill>
-                  <a:srgbClr val="334155"/>
-                </a:solidFill>
-                <a:latin typeface="Poppins"/>
-              </a:rPr>
-              <a:t>$3,497/mo</a:t>
-            </a:r>
-          </a:p>
-        </p:txBody>
-      </p:sp>
-      <p:sp>
-        <p:nvSpPr>
-          <p:cNvPr id="19" name="Rectangle 18"/>
+              <a:t>Funded by redirecting existing ad budget</a:t>
+            </a:r>
+          </a:p>
+        </p:txBody>
+      </p:sp>
+      <p:sp>
+        <p:nvSpPr>
+          <p:cNvPr id="17" name="Rectangle 16"/>
           <p:cNvSpPr/>
           <p:nvPr/>
         </p:nvSpPr>
         <p:spPr>
           <a:xfrm>
-            <a:off x="2322576" y="2642615"/>
-            <a:ext cx="804672" cy="9144"/>
+            <a:off x="201168" y="3968496"/>
+            <a:ext cx="4133087" cy="402336"/>
           </a:xfrm>
           <a:prstGeom prst="rect">
             <a:avLst/>
           </a:prstGeom>
           <a:solidFill>
-            <a:srgbClr val="334155"/>
+            <a:srgbClr val="EEF2F8"/>
           </a:solidFill>
           <a:ln>
             <a:solidFill>
@@ -9218,14 +9140,92 @@
       </p:sp>
       <p:sp>
         <p:nvSpPr>
+          <p:cNvPr id="18" name="TextBox 17"/>
+          <p:cNvSpPr txBox="1"/>
+          <p:nvPr/>
+        </p:nvSpPr>
+        <p:spPr>
+          <a:xfrm>
+            <a:off x="329184" y="3995928"/>
+            <a:ext cx="3931920" cy="347472"/>
+          </a:xfrm>
+          <a:prstGeom prst="rect">
+            <a:avLst/>
+          </a:prstGeom>
+          <a:noFill/>
+        </p:spPr>
+        <p:txBody>
+          <a:bodyPr wrap="square"/>
+          <a:lstStyle/>
+          <a:p>
+            <a:pPr algn="l"/>
+            <a:r>
+              <a:rPr sz="800" b="0" i="0">
+                <a:solidFill>
+                  <a:srgbClr val="64748B"/>
+                </a:solidFill>
+                <a:latin typeface="Poppins"/>
+              </a:rPr>
+              <a:t>+ Recommended ad spend: $3,000–$5,000/mo paid directly to Google/LSA</a:t>
+            </a:r>
+          </a:p>
+        </p:txBody>
+      </p:sp>
+      <p:sp>
+        <p:nvSpPr>
+          <p:cNvPr id="19" name="Rectangle 18"/>
+          <p:cNvSpPr/>
+          <p:nvPr/>
+        </p:nvSpPr>
+        <p:spPr>
+          <a:xfrm>
+            <a:off x="4535424" y="1024128"/>
+            <a:ext cx="4407408" cy="1316736"/>
+          </a:xfrm>
+          <a:prstGeom prst="rect">
+            <a:avLst/>
+          </a:prstGeom>
+          <a:solidFill>
+            <a:srgbClr val="ECFDF5"/>
+          </a:solidFill>
+          <a:ln>
+            <a:solidFill>
+              <a:srgbClr val="FFFFFF"/>
+            </a:solidFill>
+          </a:ln>
+        </p:spPr>
+        <p:style>
+          <a:lnRef idx="1">
+            <a:schemeClr val="accent1"/>
+          </a:lnRef>
+          <a:fillRef idx="3">
+            <a:schemeClr val="accent1"/>
+          </a:fillRef>
+          <a:effectRef idx="2">
+            <a:schemeClr val="accent1"/>
+          </a:effectRef>
+          <a:fontRef idx="minor">
+            <a:schemeClr val="lt1"/>
+          </a:fontRef>
+        </p:style>
+        <p:txBody>
+          <a:bodyPr rtlCol="0" anchor="ctr"/>
+          <a:lstStyle/>
+          <a:p>
+            <a:pPr algn="ctr"/>
+          </a:p>
+        </p:txBody>
+      </p:sp>
+      <p:sp>
+        <p:nvSpPr>
           <p:cNvPr id="20" name="TextBox 19"/>
           <p:cNvSpPr txBox="1"/>
           <p:nvPr/>
         </p:nvSpPr>
         <p:spPr>
           <a:xfrm>
-            <a:off x="475488" y="2907791"/>
-            <a:ext cx="3803904" cy="201168"/>
+            <a:off x="4700016" y="1078992"/>
+            <a:ext cx="4133087" cy="219456"/>
           </a:xfrm>
           <a:prstGeom prst="rect">
             <a:avLst/>
@@ -9238,27 +9238,303 @@
           <a:p>
             <a:pPr algn="l"/>
             <a:r>
-              <a:rPr sz="800" b="0" i="0">
-                <a:solidFill>
-                  <a:srgbClr val="64748B"/>
+              <a:rPr sz="800" b="1" i="0">
+                <a:solidFill>
+                  <a:srgbClr val="065F46"/>
                 </a:solidFill>
                 <a:latin typeface="Poppins"/>
               </a:rPr>
-              <a:t>Weekly coaching · PI masterminds · Delegation plan</a:t>
-            </a:r>
-          </a:p>
-        </p:txBody>
-      </p:sp>
-      <p:sp>
-        <p:nvSpPr>
-          <p:cNvPr id="21" name="Rectangle 20"/>
+              <a:t>PROJECTED RETURN ON AD SPEND</a:t>
+            </a:r>
+          </a:p>
+        </p:txBody>
+      </p:sp>
+      <p:sp>
+        <p:nvSpPr>
+          <p:cNvPr id="21" name="TextBox 20"/>
+          <p:cNvSpPr txBox="1"/>
+          <p:nvPr/>
+        </p:nvSpPr>
+        <p:spPr>
+          <a:xfrm>
+            <a:off x="4700016" y="1335024"/>
+            <a:ext cx="1920240" cy="256032"/>
+          </a:xfrm>
+          <a:prstGeom prst="rect">
+            <a:avLst/>
+          </a:prstGeom>
+          <a:noFill/>
+        </p:spPr>
+        <p:txBody>
+          <a:bodyPr wrap="square"/>
+          <a:lstStyle/>
+          <a:p>
+            <a:pPr algn="l"/>
+            <a:r>
+              <a:rPr sz="900" b="1" i="0">
+                <a:solidFill>
+                  <a:srgbClr val="1E293B"/>
+                </a:solidFill>
+                <a:latin typeface="Poppins"/>
+              </a:rPr>
+              <a:t>Average case value:</a:t>
+            </a:r>
+          </a:p>
+        </p:txBody>
+      </p:sp>
+      <p:sp>
+        <p:nvSpPr>
+          <p:cNvPr id="22" name="TextBox 21"/>
+          <p:cNvSpPr txBox="1"/>
+          <p:nvPr/>
+        </p:nvSpPr>
+        <p:spPr>
+          <a:xfrm>
+            <a:off x="6729984" y="1335024"/>
+            <a:ext cx="2103120" cy="256032"/>
+          </a:xfrm>
+          <a:prstGeom prst="rect">
+            <a:avLst/>
+          </a:prstGeom>
+          <a:noFill/>
+        </p:spPr>
+        <p:txBody>
+          <a:bodyPr wrap="square"/>
+          <a:lstStyle/>
+          <a:p>
+            <a:pPr algn="l"/>
+            <a:r>
+              <a:rPr sz="900" b="0" i="0">
+                <a:solidFill>
+                  <a:srgbClr val="065F46"/>
+                </a:solidFill>
+                <a:latin typeface="Poppins"/>
+              </a:rPr>
+              <a:t>$7,500</a:t>
+            </a:r>
+          </a:p>
+        </p:txBody>
+      </p:sp>
+      <p:sp>
+        <p:nvSpPr>
+          <p:cNvPr id="23" name="Rectangle 22"/>
           <p:cNvSpPr/>
           <p:nvPr/>
         </p:nvSpPr>
         <p:spPr>
           <a:xfrm>
-            <a:off x="201168" y="3255264"/>
-            <a:ext cx="4133087" cy="658368"/>
+            <a:off x="4645152" y="1609344"/>
+            <a:ext cx="4187952" cy="310896"/>
+          </a:xfrm>
+          <a:prstGeom prst="rect">
+            <a:avLst/>
+          </a:prstGeom>
+          <a:solidFill>
+            <a:srgbClr val="D1FAE5"/>
+          </a:solidFill>
+          <a:ln>
+            <a:solidFill>
+              <a:srgbClr val="FFFFFF"/>
+            </a:solidFill>
+          </a:ln>
+        </p:spPr>
+        <p:style>
+          <a:lnRef idx="1">
+            <a:schemeClr val="accent1"/>
+          </a:lnRef>
+          <a:fillRef idx="3">
+            <a:schemeClr val="accent1"/>
+          </a:fillRef>
+          <a:effectRef idx="2">
+            <a:schemeClr val="accent1"/>
+          </a:effectRef>
+          <a:fontRef idx="minor">
+            <a:schemeClr val="lt1"/>
+          </a:fontRef>
+        </p:style>
+        <p:txBody>
+          <a:bodyPr rtlCol="0" anchor="ctr"/>
+          <a:lstStyle/>
+          <a:p>
+            <a:pPr algn="ctr"/>
+          </a:p>
+        </p:txBody>
+      </p:sp>
+      <p:sp>
+        <p:nvSpPr>
+          <p:cNvPr id="24" name="TextBox 23"/>
+          <p:cNvSpPr txBox="1"/>
+          <p:nvPr/>
+        </p:nvSpPr>
+        <p:spPr>
+          <a:xfrm>
+            <a:off x="4700016" y="1645920"/>
+            <a:ext cx="1920240" cy="256032"/>
+          </a:xfrm>
+          <a:prstGeom prst="rect">
+            <a:avLst/>
+          </a:prstGeom>
+          <a:noFill/>
+        </p:spPr>
+        <p:txBody>
+          <a:bodyPr wrap="square"/>
+          <a:lstStyle/>
+          <a:p>
+            <a:pPr algn="l"/>
+            <a:r>
+              <a:rPr sz="900" b="1" i="0">
+                <a:solidFill>
+                  <a:srgbClr val="1E293B"/>
+                </a:solidFill>
+                <a:latin typeface="Poppins"/>
+              </a:rPr>
+              <a:t>Conservative  (~1 case/mo):</a:t>
+            </a:r>
+          </a:p>
+        </p:txBody>
+      </p:sp>
+      <p:sp>
+        <p:nvSpPr>
+          <p:cNvPr id="25" name="TextBox 24"/>
+          <p:cNvSpPr txBox="1"/>
+          <p:nvPr/>
+        </p:nvSpPr>
+        <p:spPr>
+          <a:xfrm>
+            <a:off x="6729984" y="1645920"/>
+            <a:ext cx="2103120" cy="256032"/>
+          </a:xfrm>
+          <a:prstGeom prst="rect">
+            <a:avLst/>
+          </a:prstGeom>
+          <a:noFill/>
+        </p:spPr>
+        <p:txBody>
+          <a:bodyPr wrap="square"/>
+          <a:lstStyle/>
+          <a:p>
+            <a:pPr algn="l"/>
+            <a:r>
+              <a:rPr sz="900" b="1" i="0">
+                <a:solidFill>
+                  <a:srgbClr val="065F46"/>
+                </a:solidFill>
+                <a:latin typeface="Poppins"/>
+              </a:rPr>
+              <a:t>$6,300 revenue · 2.1× ROAS</a:t>
+            </a:r>
+          </a:p>
+        </p:txBody>
+      </p:sp>
+      <p:sp>
+        <p:nvSpPr>
+          <p:cNvPr id="26" name="TextBox 25"/>
+          <p:cNvSpPr txBox="1"/>
+          <p:nvPr/>
+        </p:nvSpPr>
+        <p:spPr>
+          <a:xfrm>
+            <a:off x="4700016" y="1956816"/>
+            <a:ext cx="1920240" cy="256032"/>
+          </a:xfrm>
+          <a:prstGeom prst="rect">
+            <a:avLst/>
+          </a:prstGeom>
+          <a:noFill/>
+        </p:spPr>
+        <p:txBody>
+          <a:bodyPr wrap="square"/>
+          <a:lstStyle/>
+          <a:p>
+            <a:pPr algn="l"/>
+            <a:r>
+              <a:rPr sz="900" b="1" i="0">
+                <a:solidFill>
+                  <a:srgbClr val="1E293B"/>
+                </a:solidFill>
+                <a:latin typeface="Poppins"/>
+              </a:rPr>
+              <a:t>Aggressive  (1-2 cases/mo):</a:t>
+            </a:r>
+          </a:p>
+        </p:txBody>
+      </p:sp>
+      <p:sp>
+        <p:nvSpPr>
+          <p:cNvPr id="27" name="TextBox 26"/>
+          <p:cNvSpPr txBox="1"/>
+          <p:nvPr/>
+        </p:nvSpPr>
+        <p:spPr>
+          <a:xfrm>
+            <a:off x="6729984" y="1956816"/>
+            <a:ext cx="2103120" cy="256032"/>
+          </a:xfrm>
+          <a:prstGeom prst="rect">
+            <a:avLst/>
+          </a:prstGeom>
+          <a:noFill/>
+        </p:spPr>
+        <p:txBody>
+          <a:bodyPr wrap="square"/>
+          <a:lstStyle/>
+          <a:p>
+            <a:pPr algn="l"/>
+            <a:r>
+              <a:rPr sz="900" b="1" i="0">
+                <a:solidFill>
+                  <a:srgbClr val="065F46"/>
+                </a:solidFill>
+                <a:latin typeface="Poppins"/>
+              </a:rPr>
+              <a:t>$12,750 revenue · 2.55× ROAS</a:t>
+            </a:r>
+          </a:p>
+        </p:txBody>
+      </p:sp>
+      <p:sp>
+        <p:nvSpPr>
+          <p:cNvPr id="28" name="TextBox 27"/>
+          <p:cNvSpPr txBox="1"/>
+          <p:nvPr/>
+        </p:nvSpPr>
+        <p:spPr>
+          <a:xfrm>
+            <a:off x="4535424" y="2468880"/>
+            <a:ext cx="4407408" cy="237744"/>
+          </a:xfrm>
+          <a:prstGeom prst="rect">
+            <a:avLst/>
+          </a:prstGeom>
+          <a:noFill/>
+        </p:spPr>
+        <p:txBody>
+          <a:bodyPr wrap="square"/>
+          <a:lstStyle/>
+          <a:p>
+            <a:pPr algn="l"/>
+            <a:r>
+              <a:rPr sz="800" b="1" i="0">
+                <a:solidFill>
+                  <a:srgbClr val="003A59"/>
+                </a:solidFill>
+                <a:latin typeface="Poppins"/>
+              </a:rPr>
+              <a:t>WHAT HAPPENS IN THE FIRST 90 DAYS</a:t>
+            </a:r>
+          </a:p>
+        </p:txBody>
+      </p:sp>
+      <p:sp>
+        <p:nvSpPr>
+          <p:cNvPr id="29" name="Rectangle 28"/>
+          <p:cNvSpPr/>
+          <p:nvPr/>
+        </p:nvSpPr>
+        <p:spPr>
+          <a:xfrm>
+            <a:off x="4590288" y="2724912"/>
+            <a:ext cx="256032" cy="256032"/>
           </a:xfrm>
           <a:prstGeom prst="rect">
             <a:avLst/>
@@ -9296,14 +9572,14 @@
       </p:sp>
       <p:sp>
         <p:nvSpPr>
-          <p:cNvPr id="22" name="TextBox 21"/>
+          <p:cNvPr id="30" name="TextBox 29"/>
           <p:cNvSpPr txBox="1"/>
           <p:nvPr/>
         </p:nvSpPr>
         <p:spPr>
           <a:xfrm>
-            <a:off x="384048" y="3291840"/>
-            <a:ext cx="1645920" cy="237744"/>
+            <a:off x="4937760" y="2734056"/>
+            <a:ext cx="804672" cy="256032"/>
           </a:xfrm>
           <a:prstGeom prst="rect">
             <a:avLst/>
@@ -9318,25 +9594,25 @@
             <a:r>
               <a:rPr sz="800" b="1" i="0">
                 <a:solidFill>
-                  <a:srgbClr val="7CA0C0"/>
+                  <a:srgbClr val="003A59"/>
                 </a:solidFill>
                 <a:latin typeface="Poppins"/>
               </a:rPr>
-              <a:t>BUNDLE TOTAL</a:t>
-            </a:r>
-          </a:p>
-        </p:txBody>
-      </p:sp>
-      <p:sp>
-        <p:nvSpPr>
-          <p:cNvPr id="23" name="TextBox 22"/>
+              <a:t>Day 1</a:t>
+            </a:r>
+          </a:p>
+        </p:txBody>
+      </p:sp>
+      <p:sp>
+        <p:nvSpPr>
+          <p:cNvPr id="31" name="TextBox 30"/>
           <p:cNvSpPr txBox="1"/>
           <p:nvPr/>
         </p:nvSpPr>
         <p:spPr>
           <a:xfrm>
-            <a:off x="384048" y="3493008"/>
-            <a:ext cx="2194560" cy="347472"/>
+            <a:off x="5815584" y="2734056"/>
+            <a:ext cx="3054096" cy="256032"/>
           </a:xfrm>
           <a:prstGeom prst="rect">
             <a:avLst/>
@@ -9349,491 +9625,26 @@
           <a:p>
             <a:pPr algn="l"/>
             <a:r>
-              <a:rPr sz="2200" b="1" i="0">
-                <a:solidFill>
-                  <a:srgbClr val="0091C9"/>
+              <a:rPr sz="800" b="0" i="0">
+                <a:solidFill>
+                  <a:srgbClr val="1E293B"/>
                 </a:solidFill>
                 <a:latin typeface="Poppins"/>
               </a:rPr>
-              <a:t>$10,697 / mo</a:t>
-            </a:r>
-          </a:p>
-        </p:txBody>
-      </p:sp>
-      <p:sp>
-        <p:nvSpPr>
-          <p:cNvPr id="24" name="TextBox 23"/>
-          <p:cNvSpPr txBox="1"/>
-          <p:nvPr/>
-        </p:nvSpPr>
-        <p:spPr>
-          <a:xfrm>
-            <a:off x="2670048" y="3493008"/>
-            <a:ext cx="1737360" cy="347472"/>
-          </a:xfrm>
-          <a:prstGeom prst="rect">
-            <a:avLst/>
-          </a:prstGeom>
-          <a:noFill/>
-        </p:spPr>
-        <p:txBody>
-          <a:bodyPr wrap="square"/>
-          <a:lstStyle/>
-          <a:p>
-            <a:pPr algn="l"/>
-            <a:r>
-              <a:rPr sz="800" b="0" i="0">
-                <a:solidFill>
-                  <a:srgbClr val="7CA0C0"/>
-                </a:solidFill>
-                <a:latin typeface="Poppins"/>
-              </a:rPr>
-              <a:t>Save $1,797/mo by bundling</a:t>
-            </a:r>
-          </a:p>
-        </p:txBody>
-      </p:sp>
-      <p:sp>
-        <p:nvSpPr>
-          <p:cNvPr id="25" name="Rectangle 24"/>
+              <a:t>Launch Google &amp; LSA ad campaigns</a:t>
+            </a:r>
+          </a:p>
+        </p:txBody>
+      </p:sp>
+      <p:sp>
+        <p:nvSpPr>
+          <p:cNvPr id="32" name="Rectangle 31"/>
           <p:cNvSpPr/>
           <p:nvPr/>
         </p:nvSpPr>
         <p:spPr>
           <a:xfrm>
-            <a:off x="201168" y="3968496"/>
-            <a:ext cx="4133087" cy="402336"/>
-          </a:xfrm>
-          <a:prstGeom prst="rect">
-            <a:avLst/>
-          </a:prstGeom>
-          <a:solidFill>
-            <a:srgbClr val="EEF2F8"/>
-          </a:solidFill>
-          <a:ln>
-            <a:solidFill>
-              <a:srgbClr val="FFFFFF"/>
-            </a:solidFill>
-          </a:ln>
-        </p:spPr>
-        <p:style>
-          <a:lnRef idx="1">
-            <a:schemeClr val="accent1"/>
-          </a:lnRef>
-          <a:fillRef idx="3">
-            <a:schemeClr val="accent1"/>
-          </a:fillRef>
-          <a:effectRef idx="2">
-            <a:schemeClr val="accent1"/>
-          </a:effectRef>
-          <a:fontRef idx="minor">
-            <a:schemeClr val="lt1"/>
-          </a:fontRef>
-        </p:style>
-        <p:txBody>
-          <a:bodyPr rtlCol="0" anchor="ctr"/>
-          <a:lstStyle/>
-          <a:p>
-            <a:pPr algn="ctr"/>
-          </a:p>
-        </p:txBody>
-      </p:sp>
-      <p:sp>
-        <p:nvSpPr>
-          <p:cNvPr id="26" name="TextBox 25"/>
-          <p:cNvSpPr txBox="1"/>
-          <p:nvPr/>
-        </p:nvSpPr>
-        <p:spPr>
-          <a:xfrm>
-            <a:off x="329184" y="3995928"/>
-            <a:ext cx="3931920" cy="347472"/>
-          </a:xfrm>
-          <a:prstGeom prst="rect">
-            <a:avLst/>
-          </a:prstGeom>
-          <a:noFill/>
-        </p:spPr>
-        <p:txBody>
-          <a:bodyPr wrap="square"/>
-          <a:lstStyle/>
-          <a:p>
-            <a:pPr algn="l"/>
-            <a:r>
-              <a:rPr sz="800" b="0" i="0">
-                <a:solidFill>
-                  <a:srgbClr val="64748B"/>
-                </a:solidFill>
-                <a:latin typeface="Poppins"/>
-              </a:rPr>
-              <a:t>+ Recommended ad spend: $19,500–$50,000/mo paid directly to Google/Meta</a:t>
-            </a:r>
-          </a:p>
-        </p:txBody>
-      </p:sp>
-      <p:sp>
-        <p:nvSpPr>
-          <p:cNvPr id="27" name="Rectangle 26"/>
-          <p:cNvSpPr/>
-          <p:nvPr/>
-        </p:nvSpPr>
-        <p:spPr>
-          <a:xfrm>
-            <a:off x="4535424" y="1024128"/>
-            <a:ext cx="4407408" cy="1316736"/>
-          </a:xfrm>
-          <a:prstGeom prst="rect">
-            <a:avLst/>
-          </a:prstGeom>
-          <a:solidFill>
-            <a:srgbClr val="ECFDF5"/>
-          </a:solidFill>
-          <a:ln>
-            <a:solidFill>
-              <a:srgbClr val="FFFFFF"/>
-            </a:solidFill>
-          </a:ln>
-        </p:spPr>
-        <p:style>
-          <a:lnRef idx="1">
-            <a:schemeClr val="accent1"/>
-          </a:lnRef>
-          <a:fillRef idx="3">
-            <a:schemeClr val="accent1"/>
-          </a:fillRef>
-          <a:effectRef idx="2">
-            <a:schemeClr val="accent1"/>
-          </a:effectRef>
-          <a:fontRef idx="minor">
-            <a:schemeClr val="lt1"/>
-          </a:fontRef>
-        </p:style>
-        <p:txBody>
-          <a:bodyPr rtlCol="0" anchor="ctr"/>
-          <a:lstStyle/>
-          <a:p>
-            <a:pPr algn="ctr"/>
-          </a:p>
-        </p:txBody>
-      </p:sp>
-      <p:sp>
-        <p:nvSpPr>
-          <p:cNvPr id="28" name="TextBox 27"/>
-          <p:cNvSpPr txBox="1"/>
-          <p:nvPr/>
-        </p:nvSpPr>
-        <p:spPr>
-          <a:xfrm>
-            <a:off x="4700016" y="1078992"/>
-            <a:ext cx="4133087" cy="219456"/>
-          </a:xfrm>
-          <a:prstGeom prst="rect">
-            <a:avLst/>
-          </a:prstGeom>
-          <a:noFill/>
-        </p:spPr>
-        <p:txBody>
-          <a:bodyPr wrap="square"/>
-          <a:lstStyle/>
-          <a:p>
-            <a:pPr algn="l"/>
-            <a:r>
-              <a:rPr sz="800" b="1" i="0">
-                <a:solidFill>
-                  <a:srgbClr val="065F46"/>
-                </a:solidFill>
-                <a:latin typeface="Poppins"/>
-              </a:rPr>
-              <a:t>PROJECTED RETURN ON AD SPEND</a:t>
-            </a:r>
-          </a:p>
-        </p:txBody>
-      </p:sp>
-      <p:sp>
-        <p:nvSpPr>
-          <p:cNvPr id="29" name="TextBox 28"/>
-          <p:cNvSpPr txBox="1"/>
-          <p:nvPr/>
-        </p:nvSpPr>
-        <p:spPr>
-          <a:xfrm>
-            <a:off x="4700016" y="1335024"/>
-            <a:ext cx="1920240" cy="256032"/>
-          </a:xfrm>
-          <a:prstGeom prst="rect">
-            <a:avLst/>
-          </a:prstGeom>
-          <a:noFill/>
-        </p:spPr>
-        <p:txBody>
-          <a:bodyPr wrap="square"/>
-          <a:lstStyle/>
-          <a:p>
-            <a:pPr algn="l"/>
-            <a:r>
-              <a:rPr sz="900" b="1" i="0">
-                <a:solidFill>
-                  <a:srgbClr val="1E293B"/>
-                </a:solidFill>
-                <a:latin typeface="Poppins"/>
-              </a:rPr>
-              <a:t>Average case value:</a:t>
-            </a:r>
-          </a:p>
-        </p:txBody>
-      </p:sp>
-      <p:sp>
-        <p:nvSpPr>
-          <p:cNvPr id="30" name="TextBox 29"/>
-          <p:cNvSpPr txBox="1"/>
-          <p:nvPr/>
-        </p:nvSpPr>
-        <p:spPr>
-          <a:xfrm>
-            <a:off x="6729984" y="1335024"/>
-            <a:ext cx="2103120" cy="256032"/>
-          </a:xfrm>
-          <a:prstGeom prst="rect">
-            <a:avLst/>
-          </a:prstGeom>
-          <a:noFill/>
-        </p:spPr>
-        <p:txBody>
-          <a:bodyPr wrap="square"/>
-          <a:lstStyle/>
-          <a:p>
-            <a:pPr algn="l"/>
-            <a:r>
-              <a:rPr sz="900" b="0" i="0">
-                <a:solidFill>
-                  <a:srgbClr val="065F46"/>
-                </a:solidFill>
-                <a:latin typeface="Poppins"/>
-              </a:rPr>
-              <a:t>$7,500</a:t>
-            </a:r>
-          </a:p>
-        </p:txBody>
-      </p:sp>
-      <p:sp>
-        <p:nvSpPr>
-          <p:cNvPr id="31" name="Rectangle 30"/>
-          <p:cNvSpPr/>
-          <p:nvPr/>
-        </p:nvSpPr>
-        <p:spPr>
-          <a:xfrm>
-            <a:off x="4645152" y="1609344"/>
-            <a:ext cx="4187952" cy="310896"/>
-          </a:xfrm>
-          <a:prstGeom prst="rect">
-            <a:avLst/>
-          </a:prstGeom>
-          <a:solidFill>
-            <a:srgbClr val="D1FAE5"/>
-          </a:solidFill>
-          <a:ln>
-            <a:solidFill>
-              <a:srgbClr val="FFFFFF"/>
-            </a:solidFill>
-          </a:ln>
-        </p:spPr>
-        <p:style>
-          <a:lnRef idx="1">
-            <a:schemeClr val="accent1"/>
-          </a:lnRef>
-          <a:fillRef idx="3">
-            <a:schemeClr val="accent1"/>
-          </a:fillRef>
-          <a:effectRef idx="2">
-            <a:schemeClr val="accent1"/>
-          </a:effectRef>
-          <a:fontRef idx="minor">
-            <a:schemeClr val="lt1"/>
-          </a:fontRef>
-        </p:style>
-        <p:txBody>
-          <a:bodyPr rtlCol="0" anchor="ctr"/>
-          <a:lstStyle/>
-          <a:p>
-            <a:pPr algn="ctr"/>
-          </a:p>
-        </p:txBody>
-      </p:sp>
-      <p:sp>
-        <p:nvSpPr>
-          <p:cNvPr id="32" name="TextBox 31"/>
-          <p:cNvSpPr txBox="1"/>
-          <p:nvPr/>
-        </p:nvSpPr>
-        <p:spPr>
-          <a:xfrm>
-            <a:off x="4700016" y="1645920"/>
-            <a:ext cx="1920240" cy="256032"/>
-          </a:xfrm>
-          <a:prstGeom prst="rect">
-            <a:avLst/>
-          </a:prstGeom>
-          <a:noFill/>
-        </p:spPr>
-        <p:txBody>
-          <a:bodyPr wrap="square"/>
-          <a:lstStyle/>
-          <a:p>
-            <a:pPr algn="l"/>
-            <a:r>
-              <a:rPr sz="900" b="1" i="0">
-                <a:solidFill>
-                  <a:srgbClr val="1E293B"/>
-                </a:solidFill>
-                <a:latin typeface="Poppins"/>
-              </a:rPr>
-              <a:t>Conservative  (5-6 cases/mo):</a:t>
-            </a:r>
-          </a:p>
-        </p:txBody>
-      </p:sp>
-      <p:sp>
-        <p:nvSpPr>
-          <p:cNvPr id="33" name="TextBox 32"/>
-          <p:cNvSpPr txBox="1"/>
-          <p:nvPr/>
-        </p:nvSpPr>
-        <p:spPr>
-          <a:xfrm>
-            <a:off x="6729984" y="1645920"/>
-            <a:ext cx="2103120" cy="256032"/>
-          </a:xfrm>
-          <a:prstGeom prst="rect">
-            <a:avLst/>
-          </a:prstGeom>
-          <a:noFill/>
-        </p:spPr>
-        <p:txBody>
-          <a:bodyPr wrap="square"/>
-          <a:lstStyle/>
-          <a:p>
-            <a:pPr algn="l"/>
-            <a:r>
-              <a:rPr sz="900" b="1" i="0">
-                <a:solidFill>
-                  <a:srgbClr val="065F46"/>
-                </a:solidFill>
-                <a:latin typeface="Poppins"/>
-              </a:rPr>
-              <a:t>$41,000 revenue · 2.1× ROAS</a:t>
-            </a:r>
-          </a:p>
-        </p:txBody>
-      </p:sp>
-      <p:sp>
-        <p:nvSpPr>
-          <p:cNvPr id="34" name="TextBox 33"/>
-          <p:cNvSpPr txBox="1"/>
-          <p:nvPr/>
-        </p:nvSpPr>
-        <p:spPr>
-          <a:xfrm>
-            <a:off x="4700016" y="1956816"/>
-            <a:ext cx="1920240" cy="256032"/>
-          </a:xfrm>
-          <a:prstGeom prst="rect">
-            <a:avLst/>
-          </a:prstGeom>
-          <a:noFill/>
-        </p:spPr>
-        <p:txBody>
-          <a:bodyPr wrap="square"/>
-          <a:lstStyle/>
-          <a:p>
-            <a:pPr algn="l"/>
-            <a:r>
-              <a:rPr sz="900" b="1" i="0">
-                <a:solidFill>
-                  <a:srgbClr val="1E293B"/>
-                </a:solidFill>
-                <a:latin typeface="Poppins"/>
-              </a:rPr>
-              <a:t>Aggressive  (16-17 cases/mo):</a:t>
-            </a:r>
-          </a:p>
-        </p:txBody>
-      </p:sp>
-      <p:sp>
-        <p:nvSpPr>
-          <p:cNvPr id="35" name="TextBox 34"/>
-          <p:cNvSpPr txBox="1"/>
-          <p:nvPr/>
-        </p:nvSpPr>
-        <p:spPr>
-          <a:xfrm>
-            <a:off x="6729984" y="1956816"/>
-            <a:ext cx="2103120" cy="256032"/>
-          </a:xfrm>
-          <a:prstGeom prst="rect">
-            <a:avLst/>
-          </a:prstGeom>
-          <a:noFill/>
-        </p:spPr>
-        <p:txBody>
-          <a:bodyPr wrap="square"/>
-          <a:lstStyle/>
-          <a:p>
-            <a:pPr algn="l"/>
-            <a:r>
-              <a:rPr sz="900" b="1" i="0">
-                <a:solidFill>
-                  <a:srgbClr val="065F46"/>
-                </a:solidFill>
-                <a:latin typeface="Poppins"/>
-              </a:rPr>
-              <a:t>$127,000 revenue · 2.5× ROAS</a:t>
-            </a:r>
-          </a:p>
-        </p:txBody>
-      </p:sp>
-      <p:sp>
-        <p:nvSpPr>
-          <p:cNvPr id="36" name="TextBox 35"/>
-          <p:cNvSpPr txBox="1"/>
-          <p:nvPr/>
-        </p:nvSpPr>
-        <p:spPr>
-          <a:xfrm>
-            <a:off x="4535424" y="2468880"/>
-            <a:ext cx="4407408" cy="237744"/>
-          </a:xfrm>
-          <a:prstGeom prst="rect">
-            <a:avLst/>
-          </a:prstGeom>
-          <a:noFill/>
-        </p:spPr>
-        <p:txBody>
-          <a:bodyPr wrap="square"/>
-          <a:lstStyle/>
-          <a:p>
-            <a:pPr algn="l"/>
-            <a:r>
-              <a:rPr sz="800" b="1" i="0">
-                <a:solidFill>
-                  <a:srgbClr val="003A59"/>
-                </a:solidFill>
-                <a:latin typeface="Poppins"/>
-              </a:rPr>
-              <a:t>WHAT HAPPENS IN THE FIRST 90 DAYS</a:t>
-            </a:r>
-          </a:p>
-        </p:txBody>
-      </p:sp>
-      <p:sp>
-        <p:nvSpPr>
-          <p:cNvPr id="37" name="Rectangle 36"/>
-          <p:cNvSpPr/>
-          <p:nvPr/>
-        </p:nvSpPr>
-        <p:spPr>
-          <a:xfrm>
-            <a:off x="4590288" y="2724912"/>
+            <a:off x="4590288" y="3081528"/>
             <a:ext cx="256032" cy="256032"/>
           </a:xfrm>
           <a:prstGeom prst="rect">
@@ -9872,13 +9683,13 @@
       </p:sp>
       <p:sp>
         <p:nvSpPr>
-          <p:cNvPr id="38" name="TextBox 37"/>
+          <p:cNvPr id="33" name="TextBox 32"/>
           <p:cNvSpPr txBox="1"/>
           <p:nvPr/>
         </p:nvSpPr>
         <p:spPr>
           <a:xfrm>
-            <a:off x="4937760" y="2734056"/>
+            <a:off x="4937760" y="3090672"/>
             <a:ext cx="804672" cy="256032"/>
           </a:xfrm>
           <a:prstGeom prst="rect">
@@ -9898,20 +9709,20 @@
                 </a:solidFill>
                 <a:latin typeface="Poppins"/>
               </a:rPr>
-              <a:t>Day 1</a:t>
-            </a:r>
-          </a:p>
-        </p:txBody>
-      </p:sp>
-      <p:sp>
-        <p:nvSpPr>
-          <p:cNvPr id="39" name="TextBox 38"/>
+              <a:t>Day 14</a:t>
+            </a:r>
+          </a:p>
+        </p:txBody>
+      </p:sp>
+      <p:sp>
+        <p:nvSpPr>
+          <p:cNvPr id="34" name="TextBox 33"/>
           <p:cNvSpPr txBox="1"/>
           <p:nvPr/>
         </p:nvSpPr>
         <p:spPr>
           <a:xfrm>
-            <a:off x="5815584" y="2734056"/>
+            <a:off x="5815584" y="3090672"/>
             <a:ext cx="3054096" cy="256032"/>
           </a:xfrm>
           <a:prstGeom prst="rect">
@@ -9931,20 +9742,20 @@
                 </a:solidFill>
                 <a:latin typeface="Poppins"/>
               </a:rPr>
-              <a:t>Launch Google, LSA &amp; Meta ad campaigns</a:t>
-            </a:r>
-          </a:p>
-        </p:txBody>
-      </p:sp>
-      <p:sp>
-        <p:nvSpPr>
-          <p:cNvPr id="40" name="Rectangle 39"/>
+              <a:t>Bilingual website rebuild kicks off</a:t>
+            </a:r>
+          </a:p>
+        </p:txBody>
+      </p:sp>
+      <p:sp>
+        <p:nvSpPr>
+          <p:cNvPr id="35" name="Rectangle 34"/>
           <p:cNvSpPr/>
           <p:nvPr/>
         </p:nvSpPr>
         <p:spPr>
           <a:xfrm>
-            <a:off x="4590288" y="3081528"/>
+            <a:off x="4590288" y="3438144"/>
             <a:ext cx="256032" cy="256032"/>
           </a:xfrm>
           <a:prstGeom prst="rect">
@@ -9983,13 +9794,13 @@
       </p:sp>
       <p:sp>
         <p:nvSpPr>
-          <p:cNvPr id="41" name="TextBox 40"/>
+          <p:cNvPr id="36" name="TextBox 35"/>
           <p:cNvSpPr txBox="1"/>
           <p:nvPr/>
         </p:nvSpPr>
         <p:spPr>
           <a:xfrm>
-            <a:off x="4937760" y="3090672"/>
+            <a:off x="4937760" y="3447287"/>
             <a:ext cx="804672" cy="256032"/>
           </a:xfrm>
           <a:prstGeom prst="rect">
@@ -10009,20 +9820,20 @@
                 </a:solidFill>
                 <a:latin typeface="Poppins"/>
               </a:rPr>
-              <a:t>Day 14</a:t>
-            </a:r>
-          </a:p>
-        </p:txBody>
-      </p:sp>
-      <p:sp>
-        <p:nvSpPr>
-          <p:cNvPr id="42" name="TextBox 41"/>
+              <a:t>Week 2</a:t>
+            </a:r>
+          </a:p>
+        </p:txBody>
+      </p:sp>
+      <p:sp>
+        <p:nvSpPr>
+          <p:cNvPr id="37" name="TextBox 36"/>
           <p:cNvSpPr txBox="1"/>
           <p:nvPr/>
         </p:nvSpPr>
         <p:spPr>
           <a:xfrm>
-            <a:off x="5815584" y="3090672"/>
+            <a:off x="5815584" y="3447287"/>
             <a:ext cx="3054096" cy="256032"/>
           </a:xfrm>
           <a:prstGeom prst="rect">
@@ -10042,20 +9853,20 @@
                 </a:solidFill>
                 <a:latin typeface="Poppins"/>
               </a:rPr>
-              <a:t>Bilingual website rebuild kicks off</a:t>
-            </a:r>
-          </a:p>
-        </p:txBody>
-      </p:sp>
-      <p:sp>
-        <p:nvSpPr>
-          <p:cNvPr id="43" name="Rectangle 42"/>
+              <a:t>Review-generation campaign goes live</a:t>
+            </a:r>
+          </a:p>
+        </p:txBody>
+      </p:sp>
+      <p:sp>
+        <p:nvSpPr>
+          <p:cNvPr id="38" name="Rectangle 37"/>
           <p:cNvSpPr/>
           <p:nvPr/>
         </p:nvSpPr>
         <p:spPr>
           <a:xfrm>
-            <a:off x="4590288" y="3438144"/>
+            <a:off x="4590288" y="3794760"/>
             <a:ext cx="256032" cy="256032"/>
           </a:xfrm>
           <a:prstGeom prst="rect">
@@ -10094,13 +9905,13 @@
       </p:sp>
       <p:sp>
         <p:nvSpPr>
-          <p:cNvPr id="44" name="TextBox 43"/>
+          <p:cNvPr id="39" name="TextBox 38"/>
           <p:cNvSpPr txBox="1"/>
           <p:nvPr/>
         </p:nvSpPr>
         <p:spPr>
           <a:xfrm>
-            <a:off x="4937760" y="3447287"/>
+            <a:off x="4937760" y="3803904"/>
             <a:ext cx="804672" cy="256032"/>
           </a:xfrm>
           <a:prstGeom prst="rect">
@@ -10120,20 +9931,20 @@
                 </a:solidFill>
                 <a:latin typeface="Poppins"/>
               </a:rPr>
-              <a:t>Week 2</a:t>
-            </a:r>
-          </a:p>
-        </p:txBody>
-      </p:sp>
-      <p:sp>
-        <p:nvSpPr>
-          <p:cNvPr id="45" name="TextBox 44"/>
+              <a:t>Week 6</a:t>
+            </a:r>
+          </a:p>
+        </p:txBody>
+      </p:sp>
+      <p:sp>
+        <p:nvSpPr>
+          <p:cNvPr id="40" name="TextBox 39"/>
           <p:cNvSpPr txBox="1"/>
           <p:nvPr/>
         </p:nvSpPr>
         <p:spPr>
           <a:xfrm>
-            <a:off x="5815584" y="3447287"/>
+            <a:off x="5815584" y="3803904"/>
             <a:ext cx="3054096" cy="256032"/>
           </a:xfrm>
           <a:prstGeom prst="rect">
@@ -10153,20 +9964,20 @@
                 </a:solidFill>
                 <a:latin typeface="Poppins"/>
               </a:rPr>
-              <a:t>Review-generation campaign goes live</a:t>
-            </a:r>
-          </a:p>
-        </p:txBody>
-      </p:sp>
-      <p:sp>
-        <p:nvSpPr>
-          <p:cNvPr id="46" name="Rectangle 45"/>
+              <a:t>First cost-per-case ROI report</a:t>
+            </a:r>
+          </a:p>
+        </p:txBody>
+      </p:sp>
+      <p:sp>
+        <p:nvSpPr>
+          <p:cNvPr id="41" name="Rectangle 40"/>
           <p:cNvSpPr/>
           <p:nvPr/>
         </p:nvSpPr>
         <p:spPr>
           <a:xfrm>
-            <a:off x="4590288" y="3794760"/>
+            <a:off x="4590288" y="4151376"/>
             <a:ext cx="256032" cy="256032"/>
           </a:xfrm>
           <a:prstGeom prst="rect">
@@ -10205,13 +10016,13 @@
       </p:sp>
       <p:sp>
         <p:nvSpPr>
-          <p:cNvPr id="47" name="TextBox 46"/>
+          <p:cNvPr id="42" name="TextBox 41"/>
           <p:cNvSpPr txBox="1"/>
           <p:nvPr/>
         </p:nvSpPr>
         <p:spPr>
           <a:xfrm>
-            <a:off x="4937760" y="3803904"/>
+            <a:off x="4937760" y="4160520"/>
             <a:ext cx="804672" cy="256032"/>
           </a:xfrm>
           <a:prstGeom prst="rect">
@@ -10231,20 +10042,20 @@
                 </a:solidFill>
                 <a:latin typeface="Poppins"/>
               </a:rPr>
-              <a:t>Week 3</a:t>
-            </a:r>
-          </a:p>
-        </p:txBody>
-      </p:sp>
-      <p:sp>
-        <p:nvSpPr>
-          <p:cNvPr id="48" name="TextBox 47"/>
+              <a:t>Month 3</a:t>
+            </a:r>
+          </a:p>
+        </p:txBody>
+      </p:sp>
+      <p:sp>
+        <p:nvSpPr>
+          <p:cNvPr id="43" name="TextBox 42"/>
           <p:cNvSpPr txBox="1"/>
           <p:nvPr/>
         </p:nvSpPr>
         <p:spPr>
           <a:xfrm>
-            <a:off x="5815584" y="3803904"/>
+            <a:off x="5815584" y="4160520"/>
             <a:ext cx="3054096" cy="256032"/>
           </a:xfrm>
           <a:prstGeom prst="rect">
@@ -10264,21 +10075,21 @@
                 </a:solidFill>
                 <a:latin typeface="Poppins"/>
               </a:rPr>
-              <a:t>Elite Coach Plus coaching begins</a:t>
-            </a:r>
-          </a:p>
-        </p:txBody>
-      </p:sp>
-      <p:sp>
-        <p:nvSpPr>
-          <p:cNvPr id="49" name="Rectangle 48"/>
+              <a:t>Evaluate tier upgrade as results come in</a:t>
+            </a:r>
+          </a:p>
+        </p:txBody>
+      </p:sp>
+      <p:sp>
+        <p:nvSpPr>
+          <p:cNvPr id="44" name="Rectangle 43"/>
           <p:cNvSpPr/>
           <p:nvPr/>
         </p:nvSpPr>
         <p:spPr>
           <a:xfrm>
-            <a:off x="4590288" y="4151376"/>
-            <a:ext cx="256032" cy="256032"/>
+            <a:off x="0" y="4425696"/>
+            <a:ext cx="9144000" cy="402336"/>
           </a:xfrm>
           <a:prstGeom prst="rect">
             <a:avLst/>
@@ -10316,14 +10127,14 @@
       </p:sp>
       <p:sp>
         <p:nvSpPr>
-          <p:cNvPr id="50" name="TextBox 49"/>
+          <p:cNvPr id="45" name="TextBox 44"/>
           <p:cNvSpPr txBox="1"/>
           <p:nvPr/>
         </p:nvSpPr>
         <p:spPr>
           <a:xfrm>
-            <a:off x="4937760" y="4160520"/>
-            <a:ext cx="804672" cy="256032"/>
+            <a:off x="274320" y="4425696"/>
+            <a:ext cx="8595360" cy="402336"/>
           </a:xfrm>
           <a:prstGeom prst="rect">
             <a:avLst/>
@@ -10334,62 +10145,29 @@
           <a:bodyPr wrap="square"/>
           <a:lstStyle/>
           <a:p>
-            <a:pPr algn="l"/>
-            <a:r>
-              <a:rPr sz="800" b="1" i="0">
-                <a:solidFill>
-                  <a:srgbClr val="003A59"/>
+            <a:pPr algn="ctr"/>
+            <a:r>
+              <a:rPr sz="900" b="0" i="1">
+                <a:solidFill>
+                  <a:srgbClr val="8BADD0"/>
                 </a:solidFill>
                 <a:latin typeface="Poppins"/>
               </a:rPr>
-              <a:t>Month 3</a:t>
-            </a:r>
-          </a:p>
-        </p:txBody>
-      </p:sp>
-      <p:sp>
-        <p:nvSpPr>
-          <p:cNvPr id="51" name="TextBox 50"/>
-          <p:cNvSpPr txBox="1"/>
-          <p:nvPr/>
-        </p:nvSpPr>
-        <p:spPr>
-          <a:xfrm>
-            <a:off x="5815584" y="4160520"/>
-            <a:ext cx="3054096" cy="256032"/>
-          </a:xfrm>
-          <a:prstGeom prst="rect">
-            <a:avLst/>
-          </a:prstGeom>
-          <a:noFill/>
-        </p:spPr>
-        <p:txBody>
-          <a:bodyPr wrap="square"/>
-          <a:lstStyle/>
-          <a:p>
-            <a:pPr algn="l"/>
-            <a:r>
-              <a:rPr sz="800" b="0" i="0">
-                <a:solidFill>
-                  <a:srgbClr val="1E293B"/>
-                </a:solidFill>
-                <a:latin typeface="Poppins"/>
-              </a:rPr>
-              <a:t>Intake process built, delegation begins</a:t>
-            </a:r>
-          </a:p>
-        </p:txBody>
-      </p:sp>
-      <p:sp>
-        <p:nvSpPr>
-          <p:cNvPr id="52" name="Rectangle 51"/>
+              <a:t>"I want to double this firm — and finally get my time back."</a:t>
+            </a:r>
+          </a:p>
+        </p:txBody>
+      </p:sp>
+      <p:sp>
+        <p:nvSpPr>
+          <p:cNvPr id="46" name="Rectangle 45"/>
           <p:cNvSpPr/>
           <p:nvPr/>
         </p:nvSpPr>
         <p:spPr>
           <a:xfrm>
-            <a:off x="0" y="4425696"/>
-            <a:ext cx="9144000" cy="402336"/>
+            <a:off x="0" y="4828032"/>
+            <a:ext cx="9144000" cy="320040"/>
           </a:xfrm>
           <a:prstGeom prst="rect">
             <a:avLst/>
@@ -10427,85 +10205,7 @@
       </p:sp>
       <p:sp>
         <p:nvSpPr>
-          <p:cNvPr id="53" name="TextBox 52"/>
-          <p:cNvSpPr txBox="1"/>
-          <p:nvPr/>
-        </p:nvSpPr>
-        <p:spPr>
-          <a:xfrm>
-            <a:off x="274320" y="4425696"/>
-            <a:ext cx="8595360" cy="402336"/>
-          </a:xfrm>
-          <a:prstGeom prst="rect">
-            <a:avLst/>
-          </a:prstGeom>
-          <a:noFill/>
-        </p:spPr>
-        <p:txBody>
-          <a:bodyPr wrap="square"/>
-          <a:lstStyle/>
-          <a:p>
-            <a:pPr algn="ctr"/>
-            <a:r>
-              <a:rPr sz="900" b="0" i="1">
-                <a:solidFill>
-                  <a:srgbClr val="8BADD0"/>
-                </a:solidFill>
-                <a:latin typeface="Poppins"/>
-              </a:rPr>
-              <a:t>"I want to double this firm — and finally get my time back."</a:t>
-            </a:r>
-          </a:p>
-        </p:txBody>
-      </p:sp>
-      <p:sp>
-        <p:nvSpPr>
-          <p:cNvPr id="54" name="Rectangle 53"/>
-          <p:cNvSpPr/>
-          <p:nvPr/>
-        </p:nvSpPr>
-        <p:spPr>
-          <a:xfrm>
-            <a:off x="0" y="4828032"/>
-            <a:ext cx="9144000" cy="320040"/>
-          </a:xfrm>
-          <a:prstGeom prst="rect">
-            <a:avLst/>
-          </a:prstGeom>
-          <a:solidFill>
-            <a:srgbClr val="003A59"/>
-          </a:solidFill>
-          <a:ln>
-            <a:solidFill>
-              <a:srgbClr val="FFFFFF"/>
-            </a:solidFill>
-          </a:ln>
-        </p:spPr>
-        <p:style>
-          <a:lnRef idx="1">
-            <a:schemeClr val="accent1"/>
-          </a:lnRef>
-          <a:fillRef idx="3">
-            <a:schemeClr val="accent1"/>
-          </a:fillRef>
-          <a:effectRef idx="2">
-            <a:schemeClr val="accent1"/>
-          </a:effectRef>
-          <a:fontRef idx="minor">
-            <a:schemeClr val="lt1"/>
-          </a:fontRef>
-        </p:style>
-        <p:txBody>
-          <a:bodyPr rtlCol="0" anchor="ctr"/>
-          <a:lstStyle/>
-          <a:p>
-            <a:pPr algn="ctr"/>
-          </a:p>
-        </p:txBody>
-      </p:sp>
-      <p:sp>
-        <p:nvSpPr>
-          <p:cNvPr id="55" name="TextBox 54"/>
+          <p:cNvPr id="47" name="TextBox 46"/>
           <p:cNvSpPr txBox="1"/>
           <p:nvPr/>
         </p:nvSpPr>
@@ -10538,7 +10238,7 @@
       </p:sp>
       <p:sp>
         <p:nvSpPr>
-          <p:cNvPr id="56" name="TextBox 55"/>
+          <p:cNvPr id="48" name="TextBox 47"/>
           <p:cNvSpPr txBox="1"/>
           <p:nvPr/>
         </p:nvSpPr>
